--- a/docs/carrier_risk_presentation.pptx
+++ b/docs/carrier_risk_presentation.pptx
@@ -2748,6 +2748,17 @@
               </a:defRPr>
             </a:pPr>
             <a:r>
+              <a:rPr sz="2625" b="1" dirty="0">
+                <a:solidFill>
+                  <a:srgbClr val="FFFFFF"/>
+                </a:solidFill>
+                <a:latin typeface="Hanken Grotesk"/>
+                <a:ea typeface="Hanken Grotesk"/>
+                <a:cs typeface="Hanken Grotesk"/>
+              </a:rPr>
+              <a:t>The pipeline turns raw communications </a:t>
+            </a:r>
+            <a:r>
               <a:rPr sz="2625" b="1">
                 <a:solidFill>
                   <a:srgbClr val="FFFFFF"/>
@@ -2756,7 +2767,18 @@
                 <a:ea typeface="Hanken Grotesk"/>
                 <a:cs typeface="Hanken Grotesk"/>
               </a:rPr>
-              <a:t>The pipeline turns raw communications into an operational metrics</a:t>
+              <a:t>into operational </a:t>
+            </a:r>
+            <a:r>
+              <a:rPr sz="2625" b="1" dirty="0">
+                <a:solidFill>
+                  <a:srgbClr val="FFFFFF"/>
+                </a:solidFill>
+                <a:latin typeface="Hanken Grotesk"/>
+                <a:ea typeface="Hanken Grotesk"/>
+                <a:cs typeface="Hanken Grotesk"/>
+              </a:rPr>
+              <a:t>metrics</a:t>
             </a:r>
           </a:p>
         </p:txBody>
